--- a/docs/pptx/carbo/ritu-carbo-linsubhr-egfrdisc-throm3.pptx
+++ b/docs/pptx/carbo/ritu-carbo-linsubhr-egfrdisc-throm3.pptx
@@ -2350,7 +2350,7 @@
                   <a:latin typeface="Helvetica"/>
                   <a:cs typeface="Helvetica"/>
                 </a:rPr>
-                <a:t>(too few events among the 190 Local/Early patients)</a:t>
+                <a:t>(too few events among the 189 Local/Early patients)</a:t>
               </a:r>
             </a:p>
           </p:txBody>
